--- a/spec-to-tests_使用說明_v1.0.pptx
+++ b/spec-to-tests_使用說明_v1.0.pptx
@@ -5337,7 +5337,7 @@
                 <a:ea typeface="Microsoft JhengHei"/>
                 <a:cs typeface="Microsoft JhengHei"/>
               </a:rPr>
-              <a:t>前一版手工做的時候，這裡只有一條。</a:t>
+              <a:t>只寫一條會怎樣？</a:t>
             </a:r>
           </a:p>
           <a:p>
@@ -5361,7 +5361,7 @@
                 <a:ea typeface="Microsoft JhengHei"/>
                 <a:cs typeface="Microsoft JhengHei"/>
               </a:rPr>
-              <a:t>測試人員照著跑，永遠只會驗到其中一個欄位。</a:t>
+              <a:t>測試人員照著跑，永遠只會驗到其中一個欄位、一種角色。</a:t>
             </a:r>
           </a:p>
         </p:txBody>
@@ -10008,7 +10008,7 @@
                 <a:ea typeface="Microsoft JhengHei"/>
                 <a:cs typeface="Microsoft JhengHei"/>
               </a:rPr>
-              <a:t>✗　以前的寫法</a:t>
+              <a:t>✗　這樣不算合格</a:t>
             </a:r>
           </a:p>
           <a:p>
@@ -10128,7 +10128,7 @@
                 <a:ea typeface="Microsoft JhengHei"/>
                 <a:cs typeface="Microsoft JhengHei"/>
               </a:rPr>
-              <a:t>測試人員還是得回去翻規格，才知道要填什麼、看哪裡。</a:t>
+              <a:t>每一步都是抽象佔位，測試人員還是得回去翻規格。</a:t>
             </a:r>
           </a:p>
         </p:txBody>
@@ -10238,7 +10238,7 @@
                 <a:ea typeface="Microsoft JhengHei"/>
                 <a:cs typeface="Microsoft JhengHei"/>
               </a:rPr>
-              <a:t>✓　現在的寫法</a:t>
+              <a:t>✓　這樣才算合格</a:t>
             </a:r>
           </a:p>
           <a:p>
@@ -13225,7 +13225,7 @@
                 <a:ea typeface="Microsoft JhengHei"/>
                 <a:cs typeface="Microsoft JhengHei"/>
               </a:rPr>
-              <a:t>成果</a:t>
+              <a:t>預期產出</a:t>
             </a:r>
           </a:p>
         </p:txBody>
@@ -13269,7 +13269,7 @@
                 <a:ea typeface="Microsoft JhengHei"/>
                 <a:cs typeface="Microsoft JhengHei"/>
               </a:rPr>
-              <a:t>實跑結果與三個提醒</a:t>
+              <a:t>一次實跑的產出規模</a:t>
             </a:r>
           </a:p>
         </p:txBody>
@@ -13360,7 +13360,7 @@
                 <a:ea typeface="Microsoft JhengHei"/>
                 <a:cs typeface="Microsoft JhengHei"/>
               </a:rPr>
-              <a:t>拿同一個模組的 Bible 加四份規格書實跑，檢查腳本零錯誤零警告。</a:t>
+              <a:t>把一份 Bible 加四份規格書交給它，跑完會拿到這樣一份東西，供你估算時間與範圍。</a:t>
             </a:r>
           </a:p>
         </p:txBody>
@@ -13960,7 +13960,7 @@
                 <a:ea typeface="Microsoft JhengHei"/>
                 <a:cs typeface="Microsoft JhengHei"/>
               </a:rPr>
-              <a:t>　（前一版手工做的時候是 1.00）　｜　八個展開維度全部用到　｜　待確認事項從 6 則增為 15 則</a:t>
+              <a:t>　｜　八個展開維度全部用到　｜　待確認事項 15 則，每則都標好了該找誰確認</a:t>
             </a:r>
           </a:p>
         </p:txBody>
@@ -14644,7 +14644,7 @@
                 <a:ea typeface="Microsoft JhengHei"/>
                 <a:cs typeface="Microsoft JhengHei"/>
               </a:rPr>
-              <a:t>看完之後，你應該知道什麼時候該用它、它怎麼跑、以及它會在哪些地方擋你。</a:t>
+              <a:t>看完之後，你應該知道它的邊界在哪、流程怎麼走、以及它會在哪些地方擋你。</a:t>
             </a:r>
           </a:p>
         </p:txBody>
@@ -14721,7 +14721,7 @@
                 <a:ea typeface="Microsoft JhengHei"/>
                 <a:cs typeface="Microsoft JhengHei"/>
               </a:rPr>
-              <a:t>為什麼需要它</a:t>
+              <a:t>它做什麼</a:t>
             </a:r>
           </a:p>
           <a:p>
@@ -14745,7 +14745,7 @@
                 <a:ea typeface="Microsoft JhengHei"/>
                 <a:cs typeface="Microsoft JhengHei"/>
               </a:rPr>
-              <a:t>規格模糊時，測試就得靠人力硬扛。這支 Skill 把那段硬扛變成可重複的流程。</a:t>
+              <a:t>讀規格文件，產出需求、驗收條件、測試案例與待確認清單，全部帶追溯來源。</a:t>
             </a:r>
           </a:p>
         </p:txBody>
@@ -15183,7 +15183,7 @@
                 <a:ea typeface="Microsoft JhengHei"/>
                 <a:cs typeface="Microsoft JhengHei"/>
               </a:rPr>
-              <a:t>問題</a:t>
+              <a:t>範圍</a:t>
             </a:r>
           </a:p>
         </p:txBody>
@@ -15227,7 +15227,7 @@
                 <a:ea typeface="Microsoft JhengHei"/>
                 <a:cs typeface="Microsoft JhengHei"/>
               </a:rPr>
-              <a:t>為什麼需要這支 Skill</a:t>
+              <a:t>它做什麼、不做什麼</a:t>
             </a:r>
           </a:p>
         </p:txBody>
@@ -15318,7 +15318,7 @@
                 <a:ea typeface="Microsoft JhengHei"/>
                 <a:cs typeface="Microsoft JhengHei"/>
               </a:rPr>
-              <a:t>這三件事不是假設，是同一個模組上一次手工產測試案例時真的發生的。</a:t>
+              <a:t>先把邊界講清楚，才不會期待它做它不負責的事。</a:t>
             </a:r>
           </a:p>
         </p:txBody>
@@ -15331,8 +15331,8 @@
         </p:nvSpPr>
         <p:spPr>
           <a:xfrm>
-            <a:off x="658368" y="2084832"/>
-            <a:ext cx="3442106" cy="2148840"/>
+            <a:off x="658368" y="1993392"/>
+            <a:ext cx="5245456" cy="2834640"/>
           </a:xfrm>
           <a:prstGeom prst="roundRect">
             <a:avLst>
@@ -15364,7 +15364,7 @@
           </a:fontRef>
         </p:style>
         <p:txBody>
-          <a:bodyPr rtlCol="0" anchor="t" wrap="square" lIns="219456" rIns="219456" tIns="219456"/>
+          <a:bodyPr rtlCol="0" anchor="t" wrap="square" lIns="274320" rIns="274320" tIns="274320"/>
           <a:lstStyle/>
           <a:p>
             <a:pPr algn="l">
@@ -15376,63 +15376,155 @@
               </a:spcAft>
             </a:pPr>
             <a:r>
-              <a:rPr sz="600" b="0">
-                <a:solidFill>
-                  <a:srgbClr val="2B3440"/>
-                </a:solidFill>
-                <a:latin typeface="Microsoft JhengHei"/>
-                <a:ea typeface="Microsoft JhengHei"/>
-                <a:cs typeface="Microsoft JhengHei"/>
-              </a:rPr>
-              <a:t/>
+              <a:rPr sz="1800" b="1">
+                <a:solidFill>
+                  <a:srgbClr val="2E7D4F"/>
+                </a:solidFill>
+                <a:latin typeface="Microsoft JhengHei"/>
+                <a:ea typeface="Microsoft JhengHei"/>
+                <a:cs typeface="Microsoft JhengHei"/>
+              </a:rPr>
+              <a:t>做</a:t>
             </a:r>
           </a:p>
           <a:p>
             <a:pPr algn="l">
               <a:lnSpc>
-                <a:spcPct val="125000"/>
+                <a:spcPct val="140000"/>
               </a:lnSpc>
               <a:spcBef>
-                <a:spcPts val="600"/>
-              </a:spcBef>
-              <a:spcAft>
-                <a:spcPts val="0"/>
-              </a:spcAft>
-            </a:pPr>
-            <a:r>
-              <a:rPr sz="1500" b="1">
-                <a:solidFill>
-                  <a:srgbClr val="1F3A5F"/>
-                </a:solidFill>
-                <a:latin typeface="Microsoft JhengHei"/>
-                <a:ea typeface="Microsoft JhengHei"/>
-                <a:cs typeface="Microsoft JhengHei"/>
-              </a:rPr>
-              <a:t>一條需求只長出一條案例</a:t>
+                <a:spcPts val="2000"/>
+              </a:spcBef>
+              <a:spcAft>
+                <a:spcPts val="0"/>
+              </a:spcAft>
+            </a:pPr>
+            <a:r>
+              <a:rPr sz="1350" b="1">
+                <a:solidFill>
+                  <a:srgbClr val="2E7D4F"/>
+                </a:solidFill>
+                <a:latin typeface="Microsoft JhengHei"/>
+                <a:ea typeface="Microsoft JhengHei"/>
+                <a:cs typeface="Microsoft JhengHei"/>
+              </a:rPr>
+              <a:t>✓　</a:t>
+            </a:r>
+            <a:r>
+              <a:rPr sz="1350" b="0">
+                <a:solidFill>
+                  <a:srgbClr val="2B3440"/>
+                </a:solidFill>
+                <a:latin typeface="Microsoft JhengHei"/>
+                <a:ea typeface="Microsoft JhengHei"/>
+                <a:cs typeface="Microsoft JhengHei"/>
+              </a:rPr>
+              <a:t>讀規格文件，正規化成一條一個可驗證的斷言</a:t>
             </a:r>
           </a:p>
           <a:p>
             <a:pPr algn="l">
               <a:lnSpc>
-                <a:spcPct val="145000"/>
+                <a:spcPct val="140000"/>
               </a:lnSpc>
               <a:spcBef>
-                <a:spcPts val="900"/>
-              </a:spcBef>
-              <a:spcAft>
-                <a:spcPts val="0"/>
-              </a:spcAft>
-            </a:pPr>
-            <a:r>
-              <a:rPr sz="1250" b="0">
-                <a:solidFill>
-                  <a:srgbClr val="646F7D"/>
-                </a:solidFill>
-                <a:latin typeface="Microsoft JhengHei"/>
-                <a:ea typeface="Microsoft JhengHei"/>
-                <a:cs typeface="Microsoft JhengHei"/>
-              </a:rPr>
-              <a:t>26 條需求對到 26 條驗收條件、再對到 26 條測試案例。一條牽涉 4 個欄位、2 種角色、多個錯誤碼的規則，只有一條案例在測。</a:t>
+                <a:spcPts val="2000"/>
+              </a:spcBef>
+              <a:spcAft>
+                <a:spcPts val="0"/>
+              </a:spcAft>
+            </a:pPr>
+            <a:r>
+              <a:rPr sz="1350" b="1">
+                <a:solidFill>
+                  <a:srgbClr val="2E7D4F"/>
+                </a:solidFill>
+                <a:latin typeface="Microsoft JhengHei"/>
+                <a:ea typeface="Microsoft JhengHei"/>
+                <a:cs typeface="Microsoft JhengHei"/>
+              </a:rPr>
+              <a:t>✓　</a:t>
+            </a:r>
+            <a:r>
+              <a:rPr sz="1350" b="0">
+                <a:solidFill>
+                  <a:srgbClr val="2B3440"/>
+                </a:solidFill>
+                <a:latin typeface="Microsoft JhengHei"/>
+                <a:ea typeface="Microsoft JhengHei"/>
+                <a:cs typeface="Microsoft JhengHei"/>
+              </a:rPr>
+              <a:t>依序產出驗收條件，再一對多展開成測試案例</a:t>
+            </a:r>
+          </a:p>
+          <a:p>
+            <a:pPr algn="l">
+              <a:lnSpc>
+                <a:spcPct val="140000"/>
+              </a:lnSpc>
+              <a:spcBef>
+                <a:spcPts val="2000"/>
+              </a:spcBef>
+              <a:spcAft>
+                <a:spcPts val="0"/>
+              </a:spcAft>
+            </a:pPr>
+            <a:r>
+              <a:rPr sz="1350" b="1">
+                <a:solidFill>
+                  <a:srgbClr val="2E7D4F"/>
+                </a:solidFill>
+                <a:latin typeface="Microsoft JhengHei"/>
+                <a:ea typeface="Microsoft JhengHei"/>
+                <a:cs typeface="Microsoft JhengHei"/>
+              </a:rPr>
+              <a:t>✓　</a:t>
+            </a:r>
+            <a:r>
+              <a:rPr sz="1350" b="0">
+                <a:solidFill>
+                  <a:srgbClr val="2B3440"/>
+                </a:solidFill>
+                <a:latin typeface="Microsoft JhengHei"/>
+                <a:ea typeface="Microsoft JhengHei"/>
+                <a:cs typeface="Microsoft JhengHei"/>
+              </a:rPr>
+              <a:t>衝突與定義不清列成待確認清單，標好找誰確認</a:t>
+            </a:r>
+          </a:p>
+          <a:p>
+            <a:pPr algn="l">
+              <a:lnSpc>
+                <a:spcPct val="140000"/>
+              </a:lnSpc>
+              <a:spcBef>
+                <a:spcPts val="2000"/>
+              </a:spcBef>
+              <a:spcAft>
+                <a:spcPts val="0"/>
+              </a:spcAft>
+            </a:pPr>
+            <a:r>
+              <a:rPr sz="1350" b="1">
+                <a:solidFill>
+                  <a:srgbClr val="2E7D4F"/>
+                </a:solidFill>
+                <a:latin typeface="Microsoft JhengHei"/>
+                <a:ea typeface="Microsoft JhengHei"/>
+                <a:cs typeface="Microsoft JhengHei"/>
+              </a:rPr>
+              <a:t>✓　</a:t>
+            </a:r>
+            <a:r>
+              <a:rPr sz="1350" b="0">
+                <a:solidFill>
+                  <a:srgbClr val="2B3440"/>
+                </a:solidFill>
+                <a:latin typeface="Microsoft JhengHei"/>
+                <a:ea typeface="Microsoft JhengHei"/>
+                <a:cs typeface="Microsoft JhengHei"/>
+              </a:rPr>
+              <a:t>每筆都帶來源與風險等級，改版可帶上一版重跑</a:t>
             </a:r>
           </a:p>
         </p:txBody>
@@ -15445,14 +15537,14 @@
         </p:nvSpPr>
         <p:spPr>
           <a:xfrm>
-            <a:off x="877824" y="2304288"/>
-            <a:ext cx="502920" cy="50800"/>
+            <a:off x="658368" y="1993392"/>
+            <a:ext cx="5245456" cy="63500"/>
           </a:xfrm>
           <a:prstGeom prst="rect">
             <a:avLst/>
           </a:prstGeom>
           <a:solidFill>
-            <a:srgbClr val="B03936"/>
+            <a:srgbClr val="2E7D4F"/>
           </a:solidFill>
           <a:ln>
             <a:noFill/>
@@ -15489,8 +15581,8 @@
         </p:nvSpPr>
         <p:spPr>
           <a:xfrm>
-            <a:off x="4374794" y="2084832"/>
-            <a:ext cx="3442106" cy="2148840"/>
+            <a:off x="6287872" y="1993392"/>
+            <a:ext cx="5245456" cy="2834640"/>
           </a:xfrm>
           <a:prstGeom prst="roundRect">
             <a:avLst>
@@ -15522,7 +15614,7 @@
           </a:fontRef>
         </p:style>
         <p:txBody>
-          <a:bodyPr rtlCol="0" anchor="t" wrap="square" lIns="219456" rIns="219456" tIns="219456"/>
+          <a:bodyPr rtlCol="0" anchor="t" wrap="square" lIns="274320" rIns="274320" tIns="274320"/>
           <a:lstStyle/>
           <a:p>
             <a:pPr algn="l">
@@ -15534,55 +15626,66 @@
               </a:spcAft>
             </a:pPr>
             <a:r>
-              <a:rPr sz="600" b="0">
-                <a:solidFill>
-                  <a:srgbClr val="2B3440"/>
-                </a:solidFill>
-                <a:latin typeface="Microsoft JhengHei"/>
-                <a:ea typeface="Microsoft JhengHei"/>
-                <a:cs typeface="Microsoft JhengHei"/>
-              </a:rPr>
-              <a:t/>
+              <a:rPr sz="1800" b="1">
+                <a:solidFill>
+                  <a:srgbClr val="646F7D"/>
+                </a:solidFill>
+                <a:latin typeface="Microsoft JhengHei"/>
+                <a:ea typeface="Microsoft JhengHei"/>
+                <a:cs typeface="Microsoft JhengHei"/>
+              </a:rPr>
+              <a:t>不做</a:t>
             </a:r>
           </a:p>
           <a:p>
             <a:pPr algn="l">
               <a:lnSpc>
-                <a:spcPct val="125000"/>
+                <a:spcPct val="140000"/>
               </a:lnSpc>
               <a:spcBef>
-                <a:spcPts val="600"/>
-              </a:spcBef>
-              <a:spcAft>
-                <a:spcPts val="0"/>
-              </a:spcAft>
-            </a:pPr>
-            <a:r>
-              <a:rPr sz="1500" b="1">
-                <a:solidFill>
-                  <a:srgbClr val="1F3A5F"/>
-                </a:solidFill>
-                <a:latin typeface="Microsoft JhengHei"/>
-                <a:ea typeface="Microsoft JhengHei"/>
-                <a:cs typeface="Microsoft JhengHei"/>
-              </a:rPr>
-              <a:t>步驟是樣板，照著做不出來</a:t>
+                <a:spcPts val="2000"/>
+              </a:spcBef>
+              <a:spcAft>
+                <a:spcPts val="0"/>
+              </a:spcAft>
+            </a:pPr>
+            <a:r>
+              <a:rPr sz="1350" b="1">
+                <a:solidFill>
+                  <a:srgbClr val="646F7D"/>
+                </a:solidFill>
+                <a:latin typeface="Microsoft JhengHei"/>
+                <a:ea typeface="Microsoft JhengHei"/>
+                <a:cs typeface="Microsoft JhengHei"/>
+              </a:rPr>
+              <a:t>✗　</a:t>
+            </a:r>
+            <a:r>
+              <a:rPr sz="1350" b="0">
+                <a:solidFill>
+                  <a:srgbClr val="2B3440"/>
+                </a:solidFill>
+                <a:latin typeface="Microsoft JhengHei"/>
+                <a:ea typeface="Microsoft JhengHei"/>
+                <a:cs typeface="Microsoft JhengHei"/>
+              </a:rPr>
+              <a:t>不執行測試，也不產自動化腳本</a:t>
             </a:r>
           </a:p>
           <a:p>
             <a:pPr algn="l">
               <a:lnSpc>
-                <a:spcPct val="145000"/>
+                <a:spcPct val="140000"/>
               </a:lnSpc>
               <a:spcBef>
-                <a:spcPts val="900"/>
-              </a:spcBef>
-              <a:spcAft>
-                <a:spcPts val="0"/>
-              </a:spcAft>
-            </a:pPr>
-            <a:r>
-              <a:rPr sz="1250" b="0">
+                <a:spcPts val="2000"/>
+              </a:spcBef>
+              <a:spcAft>
+                <a:spcPts val="0"/>
+              </a:spcAft>
+            </a:pPr>
+            <a:r>
+              <a:rPr sz="1350" b="1">
                 <a:solidFill>
                   <a:srgbClr val="646F7D"/>
                 </a:solidFill>
@@ -15590,7 +15693,88 @@
                 <a:ea typeface="Microsoft JhengHei"/>
                 <a:cs typeface="Microsoft JhengHei"/>
               </a:rPr>
-              <a:t>「執行觸發動作：」「將實際結果與預期逐項比對」——測試人員拿到手上，還是得自己回去翻規格重寫一遍。</a:t>
+              <a:t>✗　</a:t>
+            </a:r>
+            <a:r>
+              <a:rPr sz="1350" b="0">
+                <a:solidFill>
+                  <a:srgbClr val="2B3440"/>
+                </a:solidFill>
+                <a:latin typeface="Microsoft JhengHei"/>
+                <a:ea typeface="Microsoft JhengHei"/>
+                <a:cs typeface="Microsoft JhengHei"/>
+              </a:rPr>
+              <a:t>不替你決定規格該怎麼定案，只把問題問出來</a:t>
+            </a:r>
+          </a:p>
+          <a:p>
+            <a:pPr algn="l">
+              <a:lnSpc>
+                <a:spcPct val="140000"/>
+              </a:lnSpc>
+              <a:spcBef>
+                <a:spcPts val="2000"/>
+              </a:spcBef>
+              <a:spcAft>
+                <a:spcPts val="0"/>
+              </a:spcAft>
+            </a:pPr>
+            <a:r>
+              <a:rPr sz="1350" b="1">
+                <a:solidFill>
+                  <a:srgbClr val="646F7D"/>
+                </a:solidFill>
+                <a:latin typeface="Microsoft JhengHei"/>
+                <a:ea typeface="Microsoft JhengHei"/>
+                <a:cs typeface="Microsoft JhengHei"/>
+              </a:rPr>
+              <a:t>✗　</a:t>
+            </a:r>
+            <a:r>
+              <a:rPr sz="1350" b="0">
+                <a:solidFill>
+                  <a:srgbClr val="2B3440"/>
+                </a:solidFill>
+                <a:latin typeface="Microsoft JhengHei"/>
+                <a:ea typeface="Microsoft JhengHei"/>
+                <a:cs typeface="Microsoft JhengHei"/>
+              </a:rPr>
+              <a:t>不修改來源文件，只讀不寫</a:t>
+            </a:r>
+          </a:p>
+          <a:p>
+            <a:pPr algn="l">
+              <a:lnSpc>
+                <a:spcPct val="140000"/>
+              </a:lnSpc>
+              <a:spcBef>
+                <a:spcPts val="2000"/>
+              </a:spcBef>
+              <a:spcAft>
+                <a:spcPts val="0"/>
+              </a:spcAft>
+            </a:pPr>
+            <a:r>
+              <a:rPr sz="1350" b="1">
+                <a:solidFill>
+                  <a:srgbClr val="646F7D"/>
+                </a:solidFill>
+                <a:latin typeface="Microsoft JhengHei"/>
+                <a:ea typeface="Microsoft JhengHei"/>
+                <a:cs typeface="Microsoft JhengHei"/>
+              </a:rPr>
+              <a:t>✗　</a:t>
+            </a:r>
+            <a:r>
+              <a:rPr sz="1350" b="0">
+                <a:solidFill>
+                  <a:srgbClr val="2B3440"/>
+                </a:solidFill>
+                <a:latin typeface="Microsoft JhengHei"/>
+                <a:ea typeface="Microsoft JhengHei"/>
+                <a:cs typeface="Microsoft JhengHei"/>
+              </a:rPr>
+              <a:t>不直接產上線檢查表，但可依風險等級篩選產生</a:t>
             </a:r>
           </a:p>
         </p:txBody>
@@ -15603,14 +15787,14 @@
         </p:nvSpPr>
         <p:spPr>
           <a:xfrm>
-            <a:off x="4594250" y="2304288"/>
-            <a:ext cx="502920" cy="50800"/>
+            <a:off x="6287872" y="1993392"/>
+            <a:ext cx="5245456" cy="63500"/>
           </a:xfrm>
           <a:prstGeom prst="rect">
             <a:avLst/>
           </a:prstGeom>
           <a:solidFill>
-            <a:srgbClr val="B03936"/>
+            <a:srgbClr val="646F7D"/>
           </a:solidFill>
           <a:ln>
             <a:noFill/>
@@ -15647,166 +15831,8 @@
         </p:nvSpPr>
         <p:spPr>
           <a:xfrm>
-            <a:off x="8091221" y="2084832"/>
-            <a:ext cx="3442106" cy="2148840"/>
-          </a:xfrm>
-          <a:prstGeom prst="roundRect">
-            <a:avLst>
-              <a:gd name="adj" fmla="val 12000"/>
-            </a:avLst>
-          </a:prstGeom>
-          <a:solidFill>
-            <a:srgbClr val="FFFFFF"/>
-          </a:solidFill>
-          <a:ln w="12700">
-            <a:solidFill>
-              <a:srgbClr val="D5DDE5"/>
-            </a:solidFill>
-          </a:ln>
-          <a:effectLst/>
-        </p:spPr>
-        <p:style>
-          <a:lnRef idx="1">
-            <a:schemeClr val="accent1"/>
-          </a:lnRef>
-          <a:fillRef idx="3">
-            <a:schemeClr val="accent1"/>
-          </a:fillRef>
-          <a:effectRef idx="2">
-            <a:schemeClr val="accent1"/>
-          </a:effectRef>
-          <a:fontRef idx="minor">
-            <a:schemeClr val="lt1"/>
-          </a:fontRef>
-        </p:style>
-        <p:txBody>
-          <a:bodyPr rtlCol="0" anchor="t" wrap="square" lIns="219456" rIns="219456" tIns="219456"/>
-          <a:lstStyle/>
-          <a:p>
-            <a:pPr algn="l">
-              <a:spcBef>
-                <a:spcPts val="0"/>
-              </a:spcBef>
-              <a:spcAft>
-                <a:spcPts val="0"/>
-              </a:spcAft>
-            </a:pPr>
-            <a:r>
-              <a:rPr sz="600" b="0">
-                <a:solidFill>
-                  <a:srgbClr val="2B3440"/>
-                </a:solidFill>
-                <a:latin typeface="Microsoft JhengHei"/>
-                <a:ea typeface="Microsoft JhengHei"/>
-                <a:cs typeface="Microsoft JhengHei"/>
-              </a:rPr>
-              <a:t/>
-            </a:r>
-          </a:p>
-          <a:p>
-            <a:pPr algn="l">
-              <a:lnSpc>
-                <a:spcPct val="125000"/>
-              </a:lnSpc>
-              <a:spcBef>
-                <a:spcPts val="600"/>
-              </a:spcBef>
-              <a:spcAft>
-                <a:spcPts val="0"/>
-              </a:spcAft>
-            </a:pPr>
-            <a:r>
-              <a:rPr sz="1500" b="1">
-                <a:solidFill>
-                  <a:srgbClr val="1F3A5F"/>
-                </a:solidFill>
-                <a:latin typeface="Microsoft JhengHei"/>
-                <a:ea typeface="Microsoft JhengHei"/>
-                <a:cs typeface="Microsoft JhengHei"/>
-              </a:rPr>
-              <a:t>文件裡已經有的，又重寫一次</a:t>
-            </a:r>
-          </a:p>
-          <a:p>
-            <a:pPr algn="l">
-              <a:lnSpc>
-                <a:spcPct val="145000"/>
-              </a:lnSpc>
-              <a:spcBef>
-                <a:spcPts val="900"/>
-              </a:spcBef>
-              <a:spcAft>
-                <a:spcPts val="0"/>
-              </a:spcAft>
-            </a:pPr>
-            <a:r>
-              <a:rPr sz="1250" b="0">
-                <a:solidFill>
-                  <a:srgbClr val="646F7D"/>
-                </a:solidFill>
-                <a:latin typeface="Microsoft JhengHei"/>
-                <a:ea typeface="Microsoft JhengHei"/>
-                <a:cs typeface="Microsoft JhengHei"/>
-              </a:rPr>
-              <a:t>PRD 有 13 條測試案例草案、Bible 有 8 條驗收範例與 12 條測試矩陣，全部被忽略後重新發明。</a:t>
-            </a:r>
-          </a:p>
-        </p:txBody>
-      </p:sp>
-      <p:sp>
-        <p:nvSpPr>
-          <p:cNvPr id="11" name="Rectangle 10"/>
-          <p:cNvSpPr/>
-          <p:nvPr/>
-        </p:nvSpPr>
-        <p:spPr>
-          <a:xfrm>
-            <a:off x="8310677" y="2304288"/>
-            <a:ext cx="502920" cy="50800"/>
-          </a:xfrm>
-          <a:prstGeom prst="rect">
-            <a:avLst/>
-          </a:prstGeom>
-          <a:solidFill>
-            <a:srgbClr val="B03936"/>
-          </a:solidFill>
-          <a:ln>
-            <a:noFill/>
-          </a:ln>
-          <a:effectLst/>
-        </p:spPr>
-        <p:style>
-          <a:lnRef idx="1">
-            <a:schemeClr val="accent1"/>
-          </a:lnRef>
-          <a:fillRef idx="3">
-            <a:schemeClr val="accent1"/>
-          </a:fillRef>
-          <a:effectRef idx="2">
-            <a:schemeClr val="accent1"/>
-          </a:effectRef>
-          <a:fontRef idx="minor">
-            <a:schemeClr val="lt1"/>
-          </a:fontRef>
-        </p:style>
-        <p:txBody>
-          <a:bodyPr rtlCol="0" anchor="ctr"/>
-          <a:lstStyle/>
-          <a:p>
-            <a:pPr algn="ctr"/>
-          </a:p>
-        </p:txBody>
-      </p:sp>
-      <p:sp>
-        <p:nvSpPr>
-          <p:cNvPr id="12" name="Rounded Rectangle 11"/>
-          <p:cNvSpPr/>
-          <p:nvPr/>
-        </p:nvSpPr>
-        <p:spPr>
-          <a:xfrm>
-            <a:off x="658368" y="4480560"/>
-            <a:ext cx="10874959" cy="868680"/>
+            <a:off x="658368" y="5029200"/>
+            <a:ext cx="10874959" cy="731520"/>
           </a:xfrm>
           <a:prstGeom prst="roundRect">
             <a:avLst>
@@ -15851,7 +15877,7 @@
               </a:spcAft>
             </a:pPr>
             <a:r>
-              <a:rPr sz="1350" b="1">
+              <a:rPr sz="1300" b="1">
                 <a:solidFill>
                   <a:srgbClr val="1F3A5F"/>
                 </a:solidFill>
@@ -15859,10 +15885,10 @@
                 <a:ea typeface="Microsoft JhengHei"/>
                 <a:cs typeface="Microsoft JhengHei"/>
               </a:rPr>
-              <a:t>觀念對照　</a:t>
-            </a:r>
-            <a:r>
-              <a:rPr sz="1350" b="0">
+              <a:t>一句話　</a:t>
+            </a:r>
+            <a:r>
+              <a:rPr sz="1300" b="0">
                 <a:solidFill>
                   <a:srgbClr val="2B3440"/>
                 </a:solidFill>
@@ -15870,21 +15896,21 @@
                 <a:ea typeface="Microsoft JhengHei"/>
                 <a:cs typeface="Microsoft JhengHei"/>
               </a:rPr>
-              <a:t>規格寫得越模糊，測試階段就越要靠人力硬扛，效益自然消失。這支 Skill 的做法是：模糊的地方不猜，直接留成待確認清單讓它被看見。</a:t>
-            </a:r>
-          </a:p>
-        </p:txBody>
-      </p:sp>
-      <p:sp>
-        <p:nvSpPr>
-          <p:cNvPr id="13" name="Rectangle 12"/>
+              <a:t>它產出的是「可驗證的期望」與「還沒講清楚的問題」。前者交給測試執行，後者交給規格負責人——兩邊都要有人接，這條流程才會動。</a:t>
+            </a:r>
+          </a:p>
+        </p:txBody>
+      </p:sp>
+      <p:sp>
+        <p:nvSpPr>
+          <p:cNvPr id="11" name="Rectangle 10"/>
           <p:cNvSpPr/>
           <p:nvPr/>
         </p:nvSpPr>
         <p:spPr>
           <a:xfrm>
-            <a:off x="658368" y="4480560"/>
-            <a:ext cx="50800" cy="868680"/>
+            <a:off x="658368" y="5029200"/>
+            <a:ext cx="50800" cy="731520"/>
           </a:xfrm>
           <a:prstGeom prst="rect">
             <a:avLst/>
@@ -15921,7 +15947,7 @@
       </p:sp>
       <p:sp>
         <p:nvSpPr>
-          <p:cNvPr id="14" name="TextBox 13"/>
+          <p:cNvPr id="12" name="TextBox 11"/>
           <p:cNvSpPr txBox="1"/>
           <p:nvPr/>
         </p:nvSpPr>
@@ -15957,7 +15983,7 @@
       </p:sp>
       <p:sp>
         <p:nvSpPr>
-          <p:cNvPr id="15" name="TextBox 14"/>
+          <p:cNvPr id="13" name="TextBox 12"/>
           <p:cNvSpPr txBox="1"/>
           <p:nvPr/>
         </p:nvSpPr>
@@ -23536,7 +23562,7 @@
         <p:spPr>
           <a:xfrm>
             <a:off x="658368" y="5321808"/>
-            <a:ext cx="10874959" cy="786384"/>
+            <a:ext cx="10874959" cy="969264"/>
           </a:xfrm>
           <a:prstGeom prst="roundRect">
             <a:avLst>
@@ -23566,7 +23592,7 @@
           </a:fontRef>
         </p:style>
         <p:txBody>
-          <a:bodyPr rtlCol="0" anchor="ctr" wrap="square" lIns="201168"/>
+          <a:bodyPr rtlCol="0" anchor="t" wrap="square" lIns="219456" tIns="146304"/>
           <a:lstStyle/>
           <a:p>
             <a:pPr algn="l">
@@ -23600,7 +23626,42 @@
                 <a:ea typeface="Microsoft JhengHei"/>
                 <a:cs typeface="Microsoft JhengHei"/>
               </a:rPr>
-              <a:t>沒有值域限制就不要硬湊邊界、沒有併發語意就不要硬湊併發。每條案例都要能說出它在驗哪一個具體風險，案例數不是指標——寧可 15 條每次都跑，不要 200 條沒人看。</a:t>
+              <a:t>沒有值域限制就不要硬湊邊界、沒有併發語意就不要硬湊併發。每條案例都要能說出它在驗哪一個具體風險。</a:t>
+            </a:r>
+          </a:p>
+          <a:p>
+            <a:pPr algn="l">
+              <a:lnSpc>
+                <a:spcPct val="135000"/>
+              </a:lnSpc>
+              <a:spcBef>
+                <a:spcPts val="700"/>
+              </a:spcBef>
+              <a:spcAft>
+                <a:spcPts val="0"/>
+              </a:spcAft>
+            </a:pPr>
+            <a:r>
+              <a:rPr sz="1200" b="1">
+                <a:solidFill>
+                  <a:srgbClr val="646F7D"/>
+                </a:solidFill>
+                <a:latin typeface="Microsoft JhengHei"/>
+                <a:ea typeface="Microsoft JhengHei"/>
+                <a:cs typeface="Microsoft JhengHei"/>
+              </a:rPr>
+              <a:t>維度從哪來　</a:t>
+            </a:r>
+            <a:r>
+              <a:rPr sz="1200" b="0">
+                <a:solidFill>
+                  <a:srgbClr val="646F7D"/>
+                </a:solidFill>
+                <a:latin typeface="Microsoft JhengHei"/>
+                <a:ea typeface="Microsoft JhengHei"/>
+                <a:cs typeface="Microsoft JhengHei"/>
+              </a:rPr>
+              <a:t>這是通用的測試設計分類，不是某一份專案文件規定的。若要成為專案共同標準，應補進 Bible 再由 Skill 引用。</a:t>
             </a:r>
           </a:p>
         </p:txBody>
@@ -23614,7 +23675,7 @@
         <p:spPr>
           <a:xfrm>
             <a:off x="658368" y="5321808"/>
-            <a:ext cx="50800" cy="786384"/>
+            <a:ext cx="50800" cy="969264"/>
           </a:xfrm>
           <a:prstGeom prst="rect">
             <a:avLst/>
